--- a/chapter6/parts/part-12-advanced-topics/clip.pptx
+++ b/chapter6/parts/part-12-advanced-topics/clip.pptx
@@ -4100,7 +4100,7 @@
               </a:defRPr>
             </a:pPr>
             <a:r>
-              <a:t>Chapter 6 — 12 Advanced Topics</a:t>
+              <a:t>Chapter 6 — Advanced Topics</a:t>
             </a:r>
           </a:p>
         </p:txBody>
@@ -4259,7 +4259,7 @@
               </a:defRPr>
             </a:pPr>
             <a:r>
-              <a:t>Chapter 6 — 12 Advanced Topics</a:t>
+              <a:t>Chapter 6 — Advanced Topics</a:t>
             </a:r>
           </a:p>
         </p:txBody>
@@ -4418,7 +4418,7 @@
               </a:defRPr>
             </a:pPr>
             <a:r>
-              <a:t>Chapter 6 — 12 Advanced Topics</a:t>
+              <a:t>Chapter 6 — Advanced Topics</a:t>
             </a:r>
           </a:p>
         </p:txBody>
@@ -4597,7 +4597,7 @@
               </a:defRPr>
             </a:pPr>
             <a:r>
-              <a:t>Chapter 6 — 12 Advanced Topics</a:t>
+              <a:t>Chapter 6 — Advanced Topics</a:t>
             </a:r>
           </a:p>
         </p:txBody>
@@ -4756,7 +4756,7 @@
               </a:defRPr>
             </a:pPr>
             <a:r>
-              <a:t>Chapter 6 — 12 Advanced Topics</a:t>
+              <a:t>Chapter 6 — Advanced Topics</a:t>
             </a:r>
           </a:p>
         </p:txBody>
@@ -4915,7 +4915,7 @@
               </a:defRPr>
             </a:pPr>
             <a:r>
-              <a:t>Chapter 6 — 12 Advanced Topics</a:t>
+              <a:t>Chapter 6 — Advanced Topics</a:t>
             </a:r>
           </a:p>
         </p:txBody>
@@ -5074,7 +5074,7 @@
               </a:defRPr>
             </a:pPr>
             <a:r>
-              <a:t>Chapter 6 — 12 Advanced Topics</a:t>
+              <a:t>Chapter 6 — Advanced Topics</a:t>
             </a:r>
           </a:p>
         </p:txBody>
@@ -5233,7 +5233,7 @@
               </a:defRPr>
             </a:pPr>
             <a:r>
-              <a:t>Chapter 6 — 12 Advanced Topics</a:t>
+              <a:t>Chapter 6 — Advanced Topics</a:t>
             </a:r>
           </a:p>
         </p:txBody>

--- a/chapter6/parts/part-12-advanced-topics/clip.pptx
+++ b/chapter6/parts/part-12-advanced-topics/clip.pptx
@@ -4184,10 +4184,12 @@
           </a:bodyPr>
           <a:lstStyle/>
           <a:p>
-            <a:pPr>
+            <a:pPr lvl="0" marL="457200" indent="-228600">
+              <a:buFont typeface="Calibri"/>
               <a:spcAft>
                 <a:spcPts val="1000"/>
               </a:spcAft>
+              <a:buSzPct val="100000"/>
               <a:buChar char="•"/>
               <a:lnSpc>
                 <a:spcPts val="2200"/>
@@ -4204,10 +4206,12 @@
             </a:r>
           </a:p>
           <a:p>
-            <a:pPr>
+            <a:pPr lvl="0" marL="457200" indent="-228600">
+              <a:buFont typeface="Calibri"/>
               <a:spcAft>
                 <a:spcPts val="1000"/>
               </a:spcAft>
+              <a:buSzPct val="100000"/>
               <a:buChar char="•"/>
               <a:lnSpc>
                 <a:spcPts val="2200"/>
@@ -4343,10 +4347,12 @@
           </a:bodyPr>
           <a:lstStyle/>
           <a:p>
-            <a:pPr>
+            <a:pPr lvl="0" marL="457200" indent="-228600">
+              <a:buFont typeface="Calibri"/>
               <a:spcAft>
                 <a:spcPts val="1000"/>
               </a:spcAft>
+              <a:buSzPct val="100000"/>
               <a:buChar char="•"/>
               <a:lnSpc>
                 <a:spcPts val="2200"/>
@@ -4363,10 +4369,12 @@
             </a:r>
           </a:p>
           <a:p>
-            <a:pPr>
+            <a:pPr lvl="0" marL="457200" indent="-228600">
+              <a:buFont typeface="Calibri"/>
               <a:spcAft>
                 <a:spcPts val="1000"/>
               </a:spcAft>
+              <a:buSzPct val="100000"/>
               <a:buChar char="•"/>
               <a:lnSpc>
                 <a:spcPts val="2200"/>
@@ -4502,10 +4510,12 @@
           </a:bodyPr>
           <a:lstStyle/>
           <a:p>
-            <a:pPr>
+            <a:pPr lvl="0" marL="457200" indent="-228600">
+              <a:buFont typeface="Calibri"/>
               <a:spcAft>
                 <a:spcPts val="1000"/>
               </a:spcAft>
+              <a:buSzPct val="100000"/>
               <a:buChar char="•"/>
               <a:lnSpc>
                 <a:spcPts val="2200"/>
@@ -4522,10 +4532,12 @@
             </a:r>
           </a:p>
           <a:p>
-            <a:pPr>
+            <a:pPr lvl="0" marL="457200" indent="-228600">
+              <a:buFont typeface="Calibri"/>
               <a:spcAft>
                 <a:spcPts val="1000"/>
               </a:spcAft>
+              <a:buSzPct val="100000"/>
               <a:buChar char="•"/>
               <a:lnSpc>
                 <a:spcPts val="2200"/>
@@ -4542,10 +4554,12 @@
             </a:r>
           </a:p>
           <a:p>
-            <a:pPr>
+            <a:pPr lvl="0" marL="457200" indent="-228600">
+              <a:buFont typeface="Calibri"/>
               <a:spcAft>
                 <a:spcPts val="1000"/>
               </a:spcAft>
+              <a:buSzPct val="100000"/>
               <a:buChar char="•"/>
               <a:lnSpc>
                 <a:spcPts val="2200"/>
@@ -4681,10 +4695,12 @@
           </a:bodyPr>
           <a:lstStyle/>
           <a:p>
-            <a:pPr>
+            <a:pPr lvl="0" marL="457200" indent="-228600">
+              <a:buFont typeface="Calibri"/>
               <a:spcAft>
                 <a:spcPts val="1000"/>
               </a:spcAft>
+              <a:buSzPct val="100000"/>
               <a:buChar char="•"/>
               <a:lnSpc>
                 <a:spcPts val="2200"/>
@@ -4701,10 +4717,12 @@
             </a:r>
           </a:p>
           <a:p>
-            <a:pPr>
+            <a:pPr lvl="0" marL="457200" indent="-228600">
+              <a:buFont typeface="Calibri"/>
               <a:spcAft>
                 <a:spcPts val="1000"/>
               </a:spcAft>
+              <a:buSzPct val="100000"/>
               <a:buChar char="•"/>
               <a:lnSpc>
                 <a:spcPts val="2200"/>
@@ -4840,10 +4858,12 @@
           </a:bodyPr>
           <a:lstStyle/>
           <a:p>
-            <a:pPr>
+            <a:pPr lvl="0" marL="457200" indent="-228600">
+              <a:buFont typeface="Calibri"/>
               <a:spcAft>
                 <a:spcPts val="1000"/>
               </a:spcAft>
+              <a:buSzPct val="100000"/>
               <a:buChar char="•"/>
               <a:lnSpc>
                 <a:spcPts val="2200"/>
@@ -4860,10 +4880,12 @@
             </a:r>
           </a:p>
           <a:p>
-            <a:pPr>
+            <a:pPr lvl="0" marL="457200" indent="-228600">
+              <a:buFont typeface="Calibri"/>
               <a:spcAft>
                 <a:spcPts val="1000"/>
               </a:spcAft>
+              <a:buSzPct val="100000"/>
               <a:buChar char="•"/>
               <a:lnSpc>
                 <a:spcPts val="2200"/>
@@ -4999,10 +5021,12 @@
           </a:bodyPr>
           <a:lstStyle/>
           <a:p>
-            <a:pPr>
+            <a:pPr lvl="0" marL="457200" indent="-228600">
+              <a:buFont typeface="Calibri"/>
               <a:spcAft>
                 <a:spcPts val="1000"/>
               </a:spcAft>
+              <a:buSzPct val="100000"/>
               <a:buChar char="•"/>
               <a:lnSpc>
                 <a:spcPts val="2200"/>
@@ -5019,10 +5043,12 @@
             </a:r>
           </a:p>
           <a:p>
-            <a:pPr>
+            <a:pPr lvl="0" marL="457200" indent="-228600">
+              <a:buFont typeface="Calibri"/>
               <a:spcAft>
                 <a:spcPts val="1000"/>
               </a:spcAft>
+              <a:buSzPct val="100000"/>
               <a:buChar char="•"/>
               <a:lnSpc>
                 <a:spcPts val="2200"/>
@@ -5158,10 +5184,12 @@
           </a:bodyPr>
           <a:lstStyle/>
           <a:p>
-            <a:pPr>
+            <a:pPr lvl="0" marL="457200" indent="-228600">
+              <a:buFont typeface="Calibri"/>
               <a:spcAft>
                 <a:spcPts val="1000"/>
               </a:spcAft>
+              <a:buSzPct val="100000"/>
               <a:buChar char="•"/>
               <a:lnSpc>
                 <a:spcPts val="2200"/>
@@ -5178,10 +5206,12 @@
             </a:r>
           </a:p>
           <a:p>
-            <a:pPr>
+            <a:pPr lvl="0" marL="457200" indent="-228600">
+              <a:buFont typeface="Calibri"/>
               <a:spcAft>
                 <a:spcPts val="1000"/>
               </a:spcAft>
+              <a:buSzPct val="100000"/>
               <a:buChar char="•"/>
               <a:lnSpc>
                 <a:spcPts val="2200"/>
